--- a/tests/fixtures/corpus/documents/library-talk-2018.pptx
+++ b/tests/fixtures/corpus/documents/library-talk-2018.pptx
@@ -61,6 +61,11 @@
           <a:t>Their children: Ursula, Klara 'Pünktchen' and Gustav 'Gustl'</a:t>
         </a:r>
       </a:p>
+      <p:pic>
+        <p:blipFill>
+          <a:blip r:embed="rId2"/>
+        </p:blipFill>
+      </p:pic>
     </p:spTree>
   </p:cSld>
 </p:sld>
